--- a/ppt/RAG04-Embedding.pptx
+++ b/ppt/RAG04-Embedding.pptx
@@ -3737,10 +3737,9 @@
           <a:p>
             <a:pPr algn="ctr"/>
             <a:r>
-              <a:rPr lang="fr-FR" sz="3600" dirty="0" err="1"/>
-              <a:t>Embedding</a:t>
-            </a:r>
-            <a:endParaRPr lang="fr-FR" sz="3600" dirty="0"/>
+              <a:rPr lang="fr-FR" sz="3600" dirty="0"/>
+              <a:t>RAG</a:t>
+            </a:r>
           </a:p>
         </p:txBody>
       </p:sp>

--- a/ppt/RAG04-Embedding.pptx
+++ b/ppt/RAG04-Embedding.pptx
@@ -5,29 +5,30 @@
     <p:sldMasterId id="2147483653" r:id="rId1"/>
   </p:sldMasterIdLst>
   <p:notesMasterIdLst>
-    <p:notesMasterId r:id="rId19"/>
+    <p:notesMasterId r:id="rId20"/>
   </p:notesMasterIdLst>
   <p:handoutMasterIdLst>
-    <p:handoutMasterId r:id="rId20"/>
+    <p:handoutMasterId r:id="rId21"/>
   </p:handoutMasterIdLst>
   <p:sldIdLst>
     <p:sldId id="264" r:id="rId2"/>
     <p:sldId id="266" r:id="rId3"/>
-    <p:sldId id="282" r:id="rId4"/>
-    <p:sldId id="270" r:id="rId5"/>
-    <p:sldId id="275" r:id="rId6"/>
-    <p:sldId id="271" r:id="rId7"/>
-    <p:sldId id="272" r:id="rId8"/>
-    <p:sldId id="273" r:id="rId9"/>
-    <p:sldId id="274" r:id="rId10"/>
-    <p:sldId id="277" r:id="rId11"/>
-    <p:sldId id="278" r:id="rId12"/>
-    <p:sldId id="279" r:id="rId13"/>
-    <p:sldId id="280" r:id="rId14"/>
-    <p:sldId id="281" r:id="rId15"/>
-    <p:sldId id="283" r:id="rId16"/>
-    <p:sldId id="284" r:id="rId17"/>
-    <p:sldId id="285" r:id="rId18"/>
+    <p:sldId id="287" r:id="rId4"/>
+    <p:sldId id="282" r:id="rId5"/>
+    <p:sldId id="270" r:id="rId6"/>
+    <p:sldId id="275" r:id="rId7"/>
+    <p:sldId id="271" r:id="rId8"/>
+    <p:sldId id="272" r:id="rId9"/>
+    <p:sldId id="273" r:id="rId10"/>
+    <p:sldId id="274" r:id="rId11"/>
+    <p:sldId id="277" r:id="rId12"/>
+    <p:sldId id="278" r:id="rId13"/>
+    <p:sldId id="279" r:id="rId14"/>
+    <p:sldId id="280" r:id="rId15"/>
+    <p:sldId id="281" r:id="rId16"/>
+    <p:sldId id="283" r:id="rId17"/>
+    <p:sldId id="284" r:id="rId18"/>
+    <p:sldId id="285" r:id="rId19"/>
   </p:sldIdLst>
   <p:sldSz cx="9144000" cy="6858000" type="screen4x3"/>
   <p:notesSz cx="6648450" cy="9782175"/>
@@ -3803,6 +3804,181 @@
           <p:cNvPr id="2" name="Titre 1">
             <a:extLst>
               <a:ext uri="{FF2B5EF4-FFF2-40B4-BE49-F238E27FC236}">
+                <a16:creationId xmlns:a16="http://schemas.microsoft.com/office/drawing/2014/main" id="{18072005-90E5-E75D-04D4-7D391ECAA81B}"/>
+              </a:ext>
+            </a:extLst>
+          </p:cNvPr>
+          <p:cNvSpPr>
+            <a:spLocks noGrp="1"/>
+          </p:cNvSpPr>
+          <p:nvPr>
+            <p:ph type="title"/>
+          </p:nvPr>
+        </p:nvSpPr>
+        <p:spPr/>
+        <p:txBody>
+          <a:bodyPr/>
+          <a:lstStyle/>
+          <a:p>
+            <a:r>
+              <a:rPr lang="fr-FR" dirty="0"/>
+              <a:t>Transformation </a:t>
+            </a:r>
+            <a:r>
+              <a:rPr lang="fr-FR" dirty="0" err="1"/>
+              <a:t>cosine</a:t>
+            </a:r>
+            <a:endParaRPr lang="fr-FR" dirty="0"/>
+          </a:p>
+        </p:txBody>
+      </p:sp>
+      <p:sp>
+        <p:nvSpPr>
+          <p:cNvPr id="3" name="Espace réservé du contenu 2">
+            <a:extLst>
+              <a:ext uri="{FF2B5EF4-FFF2-40B4-BE49-F238E27FC236}">
+                <a16:creationId xmlns:a16="http://schemas.microsoft.com/office/drawing/2014/main" id="{0EE7EEF7-B975-0B16-D81D-3634D9506FDC}"/>
+              </a:ext>
+            </a:extLst>
+          </p:cNvPr>
+          <p:cNvSpPr>
+            <a:spLocks noGrp="1"/>
+          </p:cNvSpPr>
+          <p:nvPr>
+            <p:ph idx="1"/>
+          </p:nvPr>
+        </p:nvSpPr>
+        <p:spPr/>
+        <p:txBody>
+          <a:bodyPr/>
+          <a:lstStyle/>
+          <a:p>
+            <a:r>
+              <a:rPr lang="fr-FR" dirty="0"/>
+              <a:t>La transformation </a:t>
+            </a:r>
+            <a:r>
+              <a:rPr lang="fr-FR" dirty="0" err="1"/>
+              <a:t>cosine</a:t>
+            </a:r>
+            <a:r>
+              <a:rPr lang="fr-FR" dirty="0"/>
+              <a:t> permet de calculer un cosinus entre 2 vecteurs dans des dimensions très élevées</a:t>
+            </a:r>
+          </a:p>
+          <a:p>
+            <a:pPr lvl="1"/>
+            <a:r>
+              <a:rPr lang="fr-FR" dirty="0"/>
+              <a:t>Renvoie un cosinus entre 0 et 1</a:t>
+            </a:r>
+          </a:p>
+          <a:p>
+            <a:pPr lvl="1"/>
+            <a:r>
+              <a:rPr lang="fr-FR" dirty="0"/>
+              <a:t>Taux de ressemblance</a:t>
+            </a:r>
+          </a:p>
+          <a:p>
+            <a:pPr lvl="1"/>
+            <a:r>
+              <a:rPr lang="fr-FR" dirty="0"/>
+              <a:t>Rapide</a:t>
+            </a:r>
+          </a:p>
+          <a:p>
+            <a:pPr lvl="1"/>
+            <a:r>
+              <a:rPr lang="fr-FR" dirty="0" err="1"/>
+              <a:t>np.inner</a:t>
+            </a:r>
+            <a:r>
+              <a:rPr lang="fr-FR" dirty="0"/>
+              <a:t>(v1, v2)</a:t>
+            </a:r>
+          </a:p>
+          <a:p>
+            <a:r>
+              <a:rPr lang="fr-FR" dirty="0"/>
+              <a:t>Il existe d'autres mesures de distance de vecteurs</a:t>
+            </a:r>
+          </a:p>
+          <a:p>
+            <a:pPr lvl="1"/>
+            <a:r>
+              <a:rPr lang="fr-FR" dirty="0"/>
+              <a:t>Euclidienne : MSE = </a:t>
+            </a:r>
+            <a:r>
+              <a:rPr lang="fr-FR" dirty="0" err="1"/>
+              <a:t>Mean</a:t>
+            </a:r>
+            <a:r>
+              <a:rPr lang="fr-FR" dirty="0"/>
+              <a:t> Square </a:t>
+            </a:r>
+            <a:r>
+              <a:rPr lang="fr-FR" dirty="0" err="1"/>
+              <a:t>Error</a:t>
+            </a:r>
+            <a:endParaRPr lang="fr-FR" dirty="0"/>
+          </a:p>
+          <a:p>
+            <a:pPr lvl="1"/>
+            <a:r>
+              <a:rPr lang="fr-FR" dirty="0" err="1"/>
+              <a:t>Hamming</a:t>
+            </a:r>
+            <a:r>
+              <a:rPr lang="fr-FR" dirty="0"/>
+              <a:t> : Nombre de 0 et 1 différents / taille du vecteur</a:t>
+            </a:r>
+          </a:p>
+          <a:p>
+            <a:pPr lvl="1"/>
+            <a:r>
+              <a:rPr lang="fr-FR" dirty="0"/>
+              <a:t>Dot : produit scalaire</a:t>
+            </a:r>
+          </a:p>
+        </p:txBody>
+      </p:sp>
+    </p:spTree>
+    <p:extLst>
+      <p:ext uri="{BB962C8B-B14F-4D97-AF65-F5344CB8AC3E}">
+        <p14:creationId xmlns:p14="http://schemas.microsoft.com/office/powerpoint/2010/main" val="1434978647"/>
+      </p:ext>
+    </p:extLst>
+  </p:cSld>
+  <p:clrMapOvr>
+    <a:masterClrMapping/>
+  </p:clrMapOvr>
+</p:sld>
+</file>
+
+<file path=ppt/slides/slide11.xml><?xml version="1.0" encoding="utf-8"?>
+<p:sld xmlns:a="http://schemas.openxmlformats.org/drawingml/2006/main" xmlns:r="http://schemas.openxmlformats.org/officeDocument/2006/relationships" xmlns:p="http://schemas.openxmlformats.org/presentationml/2006/main">
+  <p:cSld>
+    <p:spTree>
+      <p:nvGrpSpPr>
+        <p:cNvPr id="1" name=""/>
+        <p:cNvGrpSpPr/>
+        <p:nvPr/>
+      </p:nvGrpSpPr>
+      <p:grpSpPr>
+        <a:xfrm>
+          <a:off x="0" y="0"/>
+          <a:ext cx="0" cy="0"/>
+          <a:chOff x="0" y="0"/>
+          <a:chExt cx="0" cy="0"/>
+        </a:xfrm>
+      </p:grpSpPr>
+      <p:sp>
+        <p:nvSpPr>
+          <p:cNvPr id="2" name="Titre 1">
+            <a:extLst>
+              <a:ext uri="{FF2B5EF4-FFF2-40B4-BE49-F238E27FC236}">
                 <a16:creationId xmlns:a16="http://schemas.microsoft.com/office/drawing/2014/main" id="{AFF6AE1A-1427-7165-27DA-DEBB4D9ECB8D}"/>
               </a:ext>
             </a:extLst>
@@ -3900,7 +4076,7 @@
 </p:sld>
 </file>
 
-<file path=ppt/slides/slide11.xml><?xml version="1.0" encoding="utf-8"?>
+<file path=ppt/slides/slide12.xml><?xml version="1.0" encoding="utf-8"?>
 <p:sld xmlns:a="http://schemas.openxmlformats.org/drawingml/2006/main" xmlns:r="http://schemas.openxmlformats.org/officeDocument/2006/relationships" xmlns:p="http://schemas.openxmlformats.org/presentationml/2006/main">
   <p:cSld>
     <p:spTree>
@@ -4089,7 +4265,7 @@
 </p:sld>
 </file>
 
-<file path=ppt/slides/slide12.xml><?xml version="1.0" encoding="utf-8"?>
+<file path=ppt/slides/slide13.xml><?xml version="1.0" encoding="utf-8"?>
 <p:sld xmlns:a="http://schemas.openxmlformats.org/drawingml/2006/main" xmlns:r="http://schemas.openxmlformats.org/officeDocument/2006/relationships" xmlns:p="http://schemas.openxmlformats.org/presentationml/2006/main">
   <p:cSld>
     <p:spTree>
@@ -4155,7 +4331,12 @@
             <p:ph idx="1"/>
           </p:nvPr>
         </p:nvSpPr>
-        <p:spPr/>
+        <p:spPr>
+          <a:xfrm>
+            <a:off x="179513" y="1412776"/>
+            <a:ext cx="6120680" cy="5040560"/>
+          </a:xfrm>
+        </p:spPr>
         <p:txBody>
           <a:bodyPr/>
           <a:lstStyle/>
@@ -4204,6 +4385,36 @@
           </a:p>
         </p:txBody>
       </p:sp>
+      <p:pic>
+        <p:nvPicPr>
+          <p:cNvPr id="5" name="Image 4">
+            <a:extLst>
+              <a:ext uri="{FF2B5EF4-FFF2-40B4-BE49-F238E27FC236}">
+                <a16:creationId xmlns:a16="http://schemas.microsoft.com/office/drawing/2014/main" id="{9B702105-D125-8112-DA6A-63581F12DF0C}"/>
+              </a:ext>
+            </a:extLst>
+          </p:cNvPr>
+          <p:cNvPicPr>
+            <a:picLocks noChangeAspect="1"/>
+          </p:cNvPicPr>
+          <p:nvPr/>
+        </p:nvPicPr>
+        <p:blipFill>
+          <a:blip r:embed="rId2"/>
+          <a:stretch>
+            <a:fillRect/>
+          </a:stretch>
+        </p:blipFill>
+        <p:spPr>
+          <a:xfrm>
+            <a:off x="6444208" y="1772816"/>
+            <a:ext cx="2353003" cy="4182059"/>
+          </a:xfrm>
+          <a:prstGeom prst="rect">
+            <a:avLst/>
+          </a:prstGeom>
+        </p:spPr>
+      </p:pic>
     </p:spTree>
     <p:extLst>
       <p:ext uri="{BB962C8B-B14F-4D97-AF65-F5344CB8AC3E}">
@@ -4217,7 +4428,7 @@
 </p:sld>
 </file>
 
-<file path=ppt/slides/slide13.xml><?xml version="1.0" encoding="utf-8"?>
+<file path=ppt/slides/slide14.xml><?xml version="1.0" encoding="utf-8"?>
 <p:sld xmlns:a="http://schemas.openxmlformats.org/drawingml/2006/main" xmlns:r="http://schemas.openxmlformats.org/officeDocument/2006/relationships" xmlns:p="http://schemas.openxmlformats.org/presentationml/2006/main">
   <p:cSld>
     <p:spTree>
@@ -4393,7 +4604,7 @@
 </p:sld>
 </file>
 
-<file path=ppt/slides/slide14.xml><?xml version="1.0" encoding="utf-8"?>
+<file path=ppt/slides/slide15.xml><?xml version="1.0" encoding="utf-8"?>
 <p:sld xmlns:a="http://schemas.openxmlformats.org/drawingml/2006/main" xmlns:r="http://schemas.openxmlformats.org/officeDocument/2006/relationships" xmlns:p="http://schemas.openxmlformats.org/presentationml/2006/main">
   <p:cSld>
     <p:spTree>
@@ -4459,7 +4670,12 @@
             <p:ph idx="1"/>
           </p:nvPr>
         </p:nvSpPr>
-        <p:spPr/>
+        <p:spPr>
+          <a:xfrm>
+            <a:off x="179513" y="1412776"/>
+            <a:ext cx="6048672" cy="5040560"/>
+          </a:xfrm>
+        </p:spPr>
         <p:txBody>
           <a:bodyPr/>
           <a:lstStyle/>
@@ -4543,13 +4759,42 @@
               <a:t>chunk</a:t>
             </a:r>
             <a:r>
-              <a:rPr lang="fr-FR"/>
+              <a:rPr lang="fr-FR" dirty="0"/>
               <a:t>, …</a:t>
             </a:r>
-            <a:endParaRPr lang="fr-FR" dirty="0"/>
           </a:p>
         </p:txBody>
       </p:sp>
+      <p:pic>
+        <p:nvPicPr>
+          <p:cNvPr id="5" name="Image 4">
+            <a:extLst>
+              <a:ext uri="{FF2B5EF4-FFF2-40B4-BE49-F238E27FC236}">
+                <a16:creationId xmlns:a16="http://schemas.microsoft.com/office/drawing/2014/main" id="{412C9F1A-D147-9C60-C2D4-AEBF78E74EE6}"/>
+              </a:ext>
+            </a:extLst>
+          </p:cNvPr>
+          <p:cNvPicPr>
+            <a:picLocks noChangeAspect="1"/>
+          </p:cNvPicPr>
+          <p:nvPr/>
+        </p:nvPicPr>
+        <p:blipFill>
+          <a:blip r:embed="rId2"/>
+          <a:stretch>
+            <a:fillRect/>
+          </a:stretch>
+        </p:blipFill>
+        <p:spPr>
+          <a:xfrm>
+            <a:off x="6228184" y="1255874"/>
+            <a:ext cx="3024333" cy="5354363"/>
+          </a:xfrm>
+          <a:prstGeom prst="rect">
+            <a:avLst/>
+          </a:prstGeom>
+        </p:spPr>
+      </p:pic>
     </p:spTree>
     <p:extLst>
       <p:ext uri="{BB962C8B-B14F-4D97-AF65-F5344CB8AC3E}">
@@ -4563,7 +4808,7 @@
 </p:sld>
 </file>
 
-<file path=ppt/slides/slide15.xml><?xml version="1.0" encoding="utf-8"?>
+<file path=ppt/slides/slide16.xml><?xml version="1.0" encoding="utf-8"?>
 <p:sld xmlns:a="http://schemas.openxmlformats.org/drawingml/2006/main" xmlns:r="http://schemas.openxmlformats.org/officeDocument/2006/relationships" xmlns:p="http://schemas.openxmlformats.org/presentationml/2006/main">
   <p:cSld>
     <p:spTree>
@@ -4730,7 +4975,7 @@
 </p:sld>
 </file>
 
-<file path=ppt/slides/slide16.xml><?xml version="1.0" encoding="utf-8"?>
+<file path=ppt/slides/slide17.xml><?xml version="1.0" encoding="utf-8"?>
 <p:sld xmlns:a="http://schemas.openxmlformats.org/drawingml/2006/main" xmlns:r="http://schemas.openxmlformats.org/officeDocument/2006/relationships" xmlns:p="http://schemas.openxmlformats.org/presentationml/2006/main">
   <p:cSld>
     <p:spTree>
@@ -4847,7 +5092,7 @@
 </p:sld>
 </file>
 
-<file path=ppt/slides/slide17.xml><?xml version="1.0" encoding="utf-8"?>
+<file path=ppt/slides/slide18.xml><?xml version="1.0" encoding="utf-8"?>
 <p:sld xmlns:a="http://schemas.openxmlformats.org/drawingml/2006/main" xmlns:r="http://schemas.openxmlformats.org/officeDocument/2006/relationships" xmlns:p="http://schemas.openxmlformats.org/presentationml/2006/main">
   <p:cSld>
     <p:spTree>
@@ -5082,6 +5327,120 @@
           <p:cNvPr id="2" name="Titre 1">
             <a:extLst>
               <a:ext uri="{FF2B5EF4-FFF2-40B4-BE49-F238E27FC236}">
+                <a16:creationId xmlns:a16="http://schemas.microsoft.com/office/drawing/2014/main" id="{48EA2389-EF72-758A-EBA1-F981B399C0B4}"/>
+              </a:ext>
+            </a:extLst>
+          </p:cNvPr>
+          <p:cNvSpPr>
+            <a:spLocks noGrp="1"/>
+          </p:cNvSpPr>
+          <p:nvPr>
+            <p:ph type="title"/>
+          </p:nvPr>
+        </p:nvSpPr>
+        <p:spPr/>
+        <p:txBody>
+          <a:bodyPr/>
+          <a:lstStyle/>
+          <a:p>
+            <a:r>
+              <a:rPr lang="fr-FR" dirty="0" err="1"/>
+              <a:t>Embedding</a:t>
+            </a:r>
+            <a:endParaRPr lang="fr-FR" dirty="0"/>
+          </a:p>
+        </p:txBody>
+      </p:sp>
+      <p:sp>
+        <p:nvSpPr>
+          <p:cNvPr id="3" name="Espace réservé du contenu 2">
+            <a:extLst>
+              <a:ext uri="{FF2B5EF4-FFF2-40B4-BE49-F238E27FC236}">
+                <a16:creationId xmlns:a16="http://schemas.microsoft.com/office/drawing/2014/main" id="{3F644524-E9D5-52B9-6472-5CD4FE1E6E2A}"/>
+              </a:ext>
+            </a:extLst>
+          </p:cNvPr>
+          <p:cNvSpPr>
+            <a:spLocks noGrp="1"/>
+          </p:cNvSpPr>
+          <p:nvPr>
+            <p:ph idx="1"/>
+          </p:nvPr>
+        </p:nvSpPr>
+        <p:spPr/>
+        <p:txBody>
+          <a:bodyPr/>
+          <a:lstStyle/>
+          <a:p>
+            <a:endParaRPr lang="fr-FR"/>
+          </a:p>
+        </p:txBody>
+      </p:sp>
+      <p:pic>
+        <p:nvPicPr>
+          <p:cNvPr id="5" name="Image 4">
+            <a:extLst>
+              <a:ext uri="{FF2B5EF4-FFF2-40B4-BE49-F238E27FC236}">
+                <a16:creationId xmlns:a16="http://schemas.microsoft.com/office/drawing/2014/main" id="{AC74A8C6-F5C1-1765-1254-5A154F7BE731}"/>
+              </a:ext>
+            </a:extLst>
+          </p:cNvPr>
+          <p:cNvPicPr>
+            <a:picLocks noChangeAspect="1"/>
+          </p:cNvPicPr>
+          <p:nvPr/>
+        </p:nvPicPr>
+        <p:blipFill>
+          <a:blip r:embed="rId2"/>
+          <a:stretch>
+            <a:fillRect/>
+          </a:stretch>
+        </p:blipFill>
+        <p:spPr>
+          <a:xfrm>
+            <a:off x="3275856" y="1276049"/>
+            <a:ext cx="2829181" cy="5177287"/>
+          </a:xfrm>
+          <a:prstGeom prst="rect">
+            <a:avLst/>
+          </a:prstGeom>
+        </p:spPr>
+      </p:pic>
+    </p:spTree>
+    <p:extLst>
+      <p:ext uri="{BB962C8B-B14F-4D97-AF65-F5344CB8AC3E}">
+        <p14:creationId xmlns:p14="http://schemas.microsoft.com/office/powerpoint/2010/main" val="3993538234"/>
+      </p:ext>
+    </p:extLst>
+  </p:cSld>
+  <p:clrMapOvr>
+    <a:masterClrMapping/>
+  </p:clrMapOvr>
+</p:sld>
+</file>
+
+<file path=ppt/slides/slide4.xml><?xml version="1.0" encoding="utf-8"?>
+<p:sld xmlns:a="http://schemas.openxmlformats.org/drawingml/2006/main" xmlns:r="http://schemas.openxmlformats.org/officeDocument/2006/relationships" xmlns:p="http://schemas.openxmlformats.org/presentationml/2006/main">
+  <p:cSld>
+    <p:spTree>
+      <p:nvGrpSpPr>
+        <p:cNvPr id="1" name=""/>
+        <p:cNvGrpSpPr/>
+        <p:nvPr/>
+      </p:nvGrpSpPr>
+      <p:grpSpPr>
+        <a:xfrm>
+          <a:off x="0" y="0"/>
+          <a:ext cx="0" cy="0"/>
+          <a:chOff x="0" y="0"/>
+          <a:chExt cx="0" cy="0"/>
+        </a:xfrm>
+      </p:grpSpPr>
+      <p:sp>
+        <p:nvSpPr>
+          <p:cNvPr id="2" name="Titre 1">
+            <a:extLst>
+              <a:ext uri="{FF2B5EF4-FFF2-40B4-BE49-F238E27FC236}">
                 <a16:creationId xmlns:a16="http://schemas.microsoft.com/office/drawing/2014/main" id="{65E92794-BC93-695F-1C63-9666BF752829}"/>
               </a:ext>
             </a:extLst>
@@ -5221,7 +5580,7 @@
 </p:sld>
 </file>
 
-<file path=ppt/slides/slide4.xml><?xml version="1.0" encoding="utf-8"?>
+<file path=ppt/slides/slide5.xml><?xml version="1.0" encoding="utf-8"?>
 <p:sld xmlns:a="http://schemas.openxmlformats.org/drawingml/2006/main" xmlns:r="http://schemas.openxmlformats.org/officeDocument/2006/relationships" xmlns:p="http://schemas.openxmlformats.org/presentationml/2006/main">
   <p:cSld>
     <p:spTree>
@@ -5345,7 +5704,7 @@
 </p:sld>
 </file>
 
-<file path=ppt/slides/slide5.xml><?xml version="1.0" encoding="utf-8"?>
+<file path=ppt/slides/slide6.xml><?xml version="1.0" encoding="utf-8"?>
 <p:sld xmlns:a="http://schemas.openxmlformats.org/drawingml/2006/main" xmlns:r="http://schemas.openxmlformats.org/officeDocument/2006/relationships" xmlns:p="http://schemas.openxmlformats.org/presentationml/2006/main">
   <p:cSld>
     <p:spTree>
@@ -5511,7 +5870,7 @@
 </p:sld>
 </file>
 
-<file path=ppt/slides/slide6.xml><?xml version="1.0" encoding="utf-8"?>
+<file path=ppt/slides/slide7.xml><?xml version="1.0" encoding="utf-8"?>
 <p:sld xmlns:a="http://schemas.openxmlformats.org/drawingml/2006/main" xmlns:r="http://schemas.openxmlformats.org/officeDocument/2006/relationships" xmlns:p="http://schemas.openxmlformats.org/presentationml/2006/main">
   <p:cSld>
     <p:spTree>
@@ -5677,7 +6036,7 @@
 </p:sld>
 </file>
 
-<file path=ppt/slides/slide7.xml><?xml version="1.0" encoding="utf-8"?>
+<file path=ppt/slides/slide8.xml><?xml version="1.0" encoding="utf-8"?>
 <p:sld xmlns:a="http://schemas.openxmlformats.org/drawingml/2006/main" xmlns:r="http://schemas.openxmlformats.org/officeDocument/2006/relationships" xmlns:p="http://schemas.openxmlformats.org/presentationml/2006/main">
   <p:cSld>
     <p:spTree>
@@ -5784,7 +6143,7 @@
 </p:sld>
 </file>
 
-<file path=ppt/slides/slide8.xml><?xml version="1.0" encoding="utf-8"?>
+<file path=ppt/slides/slide9.xml><?xml version="1.0" encoding="utf-8"?>
 <p:sld xmlns:a="http://schemas.openxmlformats.org/drawingml/2006/main" xmlns:r="http://schemas.openxmlformats.org/officeDocument/2006/relationships" xmlns:p="http://schemas.openxmlformats.org/presentationml/2006/main">
   <p:cSld>
     <p:spTree>
@@ -5911,181 +6270,6 @@
     <p:extLst>
       <p:ext uri="{BB962C8B-B14F-4D97-AF65-F5344CB8AC3E}">
         <p14:creationId xmlns:p14="http://schemas.microsoft.com/office/powerpoint/2010/main" val="2529790643"/>
-      </p:ext>
-    </p:extLst>
-  </p:cSld>
-  <p:clrMapOvr>
-    <a:masterClrMapping/>
-  </p:clrMapOvr>
-</p:sld>
-</file>
-
-<file path=ppt/slides/slide9.xml><?xml version="1.0" encoding="utf-8"?>
-<p:sld xmlns:a="http://schemas.openxmlformats.org/drawingml/2006/main" xmlns:r="http://schemas.openxmlformats.org/officeDocument/2006/relationships" xmlns:p="http://schemas.openxmlformats.org/presentationml/2006/main">
-  <p:cSld>
-    <p:spTree>
-      <p:nvGrpSpPr>
-        <p:cNvPr id="1" name=""/>
-        <p:cNvGrpSpPr/>
-        <p:nvPr/>
-      </p:nvGrpSpPr>
-      <p:grpSpPr>
-        <a:xfrm>
-          <a:off x="0" y="0"/>
-          <a:ext cx="0" cy="0"/>
-          <a:chOff x="0" y="0"/>
-          <a:chExt cx="0" cy="0"/>
-        </a:xfrm>
-      </p:grpSpPr>
-      <p:sp>
-        <p:nvSpPr>
-          <p:cNvPr id="2" name="Titre 1">
-            <a:extLst>
-              <a:ext uri="{FF2B5EF4-FFF2-40B4-BE49-F238E27FC236}">
-                <a16:creationId xmlns:a16="http://schemas.microsoft.com/office/drawing/2014/main" id="{18072005-90E5-E75D-04D4-7D391ECAA81B}"/>
-              </a:ext>
-            </a:extLst>
-          </p:cNvPr>
-          <p:cNvSpPr>
-            <a:spLocks noGrp="1"/>
-          </p:cNvSpPr>
-          <p:nvPr>
-            <p:ph type="title"/>
-          </p:nvPr>
-        </p:nvSpPr>
-        <p:spPr/>
-        <p:txBody>
-          <a:bodyPr/>
-          <a:lstStyle/>
-          <a:p>
-            <a:r>
-              <a:rPr lang="fr-FR" dirty="0"/>
-              <a:t>Transformation </a:t>
-            </a:r>
-            <a:r>
-              <a:rPr lang="fr-FR" dirty="0" err="1"/>
-              <a:t>cosine</a:t>
-            </a:r>
-            <a:endParaRPr lang="fr-FR" dirty="0"/>
-          </a:p>
-        </p:txBody>
-      </p:sp>
-      <p:sp>
-        <p:nvSpPr>
-          <p:cNvPr id="3" name="Espace réservé du contenu 2">
-            <a:extLst>
-              <a:ext uri="{FF2B5EF4-FFF2-40B4-BE49-F238E27FC236}">
-                <a16:creationId xmlns:a16="http://schemas.microsoft.com/office/drawing/2014/main" id="{0EE7EEF7-B975-0B16-D81D-3634D9506FDC}"/>
-              </a:ext>
-            </a:extLst>
-          </p:cNvPr>
-          <p:cNvSpPr>
-            <a:spLocks noGrp="1"/>
-          </p:cNvSpPr>
-          <p:nvPr>
-            <p:ph idx="1"/>
-          </p:nvPr>
-        </p:nvSpPr>
-        <p:spPr/>
-        <p:txBody>
-          <a:bodyPr/>
-          <a:lstStyle/>
-          <a:p>
-            <a:r>
-              <a:rPr lang="fr-FR" dirty="0"/>
-              <a:t>La transformation </a:t>
-            </a:r>
-            <a:r>
-              <a:rPr lang="fr-FR" dirty="0" err="1"/>
-              <a:t>cosine</a:t>
-            </a:r>
-            <a:r>
-              <a:rPr lang="fr-FR" dirty="0"/>
-              <a:t> permet de calculer un cosinus entre 2 vecteurs dans des dimensions très élevées</a:t>
-            </a:r>
-          </a:p>
-          <a:p>
-            <a:pPr lvl="1"/>
-            <a:r>
-              <a:rPr lang="fr-FR" dirty="0"/>
-              <a:t>Renvoie un cosinus entre 0 et 1</a:t>
-            </a:r>
-          </a:p>
-          <a:p>
-            <a:pPr lvl="1"/>
-            <a:r>
-              <a:rPr lang="fr-FR" dirty="0"/>
-              <a:t>Taux de ressemblance</a:t>
-            </a:r>
-          </a:p>
-          <a:p>
-            <a:pPr lvl="1"/>
-            <a:r>
-              <a:rPr lang="fr-FR" dirty="0"/>
-              <a:t>Rapide</a:t>
-            </a:r>
-          </a:p>
-          <a:p>
-            <a:pPr lvl="1"/>
-            <a:r>
-              <a:rPr lang="fr-FR" dirty="0" err="1"/>
-              <a:t>np.inner</a:t>
-            </a:r>
-            <a:r>
-              <a:rPr lang="fr-FR" dirty="0"/>
-              <a:t>(v1, v2)</a:t>
-            </a:r>
-          </a:p>
-          <a:p>
-            <a:r>
-              <a:rPr lang="fr-FR" dirty="0"/>
-              <a:t>Il existe d'autres mesures de distance de vecteurs</a:t>
-            </a:r>
-          </a:p>
-          <a:p>
-            <a:pPr lvl="1"/>
-            <a:r>
-              <a:rPr lang="fr-FR" dirty="0"/>
-              <a:t>Euclidienne : MSE = </a:t>
-            </a:r>
-            <a:r>
-              <a:rPr lang="fr-FR" dirty="0" err="1"/>
-              <a:t>Mean</a:t>
-            </a:r>
-            <a:r>
-              <a:rPr lang="fr-FR" dirty="0"/>
-              <a:t> Square </a:t>
-            </a:r>
-            <a:r>
-              <a:rPr lang="fr-FR" dirty="0" err="1"/>
-              <a:t>Error</a:t>
-            </a:r>
-            <a:endParaRPr lang="fr-FR" dirty="0"/>
-          </a:p>
-          <a:p>
-            <a:pPr lvl="1"/>
-            <a:r>
-              <a:rPr lang="fr-FR" dirty="0" err="1"/>
-              <a:t>Hamming</a:t>
-            </a:r>
-            <a:r>
-              <a:rPr lang="fr-FR" dirty="0"/>
-              <a:t> : Nombre de 0 et 1 différents / taille du vecteur</a:t>
-            </a:r>
-          </a:p>
-          <a:p>
-            <a:pPr lvl="1"/>
-            <a:r>
-              <a:rPr lang="fr-FR" dirty="0"/>
-              <a:t>Dot : produit scalaire</a:t>
-            </a:r>
-          </a:p>
-        </p:txBody>
-      </p:sp>
-    </p:spTree>
-    <p:extLst>
-      <p:ext uri="{BB962C8B-B14F-4D97-AF65-F5344CB8AC3E}">
-        <p14:creationId xmlns:p14="http://schemas.microsoft.com/office/powerpoint/2010/main" val="1434978647"/>
       </p:ext>
     </p:extLst>
   </p:cSld>

--- a/ppt/RAG04-Embedding.pptx
+++ b/ppt/RAG04-Embedding.pptx
@@ -5,10 +5,10 @@
     <p:sldMasterId id="2147483653" r:id="rId1"/>
   </p:sldMasterIdLst>
   <p:notesMasterIdLst>
-    <p:notesMasterId r:id="rId21"/>
+    <p:notesMasterId r:id="rId22"/>
   </p:notesMasterIdLst>
   <p:handoutMasterIdLst>
-    <p:handoutMasterId r:id="rId22"/>
+    <p:handoutMasterId r:id="rId23"/>
   </p:handoutMasterIdLst>
   <p:sldIdLst>
     <p:sldId id="264" r:id="rId2"/>
@@ -23,13 +23,14 @@
     <p:sldId id="273" r:id="rId11"/>
     <p:sldId id="274" r:id="rId12"/>
     <p:sldId id="277" r:id="rId13"/>
-    <p:sldId id="278" r:id="rId14"/>
-    <p:sldId id="279" r:id="rId15"/>
-    <p:sldId id="280" r:id="rId16"/>
-    <p:sldId id="281" r:id="rId17"/>
-    <p:sldId id="283" r:id="rId18"/>
-    <p:sldId id="284" r:id="rId19"/>
-    <p:sldId id="285" r:id="rId20"/>
+    <p:sldId id="289" r:id="rId14"/>
+    <p:sldId id="278" r:id="rId15"/>
+    <p:sldId id="279" r:id="rId16"/>
+    <p:sldId id="280" r:id="rId17"/>
+    <p:sldId id="281" r:id="rId18"/>
+    <p:sldId id="283" r:id="rId19"/>
+    <p:sldId id="284" r:id="rId20"/>
+    <p:sldId id="285" r:id="rId21"/>
   </p:sldIdLst>
   <p:sldSz cx="9144000" cy="6858000" type="screen4x3"/>
   <p:notesSz cx="6648450" cy="9782175"/>
@@ -4222,6 +4223,124 @@
           <p:cNvPr id="2" name="Titre 1">
             <a:extLst>
               <a:ext uri="{FF2B5EF4-FFF2-40B4-BE49-F238E27FC236}">
+                <a16:creationId xmlns:a16="http://schemas.microsoft.com/office/drawing/2014/main" id="{B3DC654A-591F-5C95-2BDA-52C391E01729}"/>
+              </a:ext>
+            </a:extLst>
+          </p:cNvPr>
+          <p:cNvSpPr>
+            <a:spLocks noGrp="1"/>
+          </p:cNvSpPr>
+          <p:nvPr>
+            <p:ph type="title"/>
+          </p:nvPr>
+        </p:nvSpPr>
+        <p:spPr/>
+        <p:txBody>
+          <a:bodyPr/>
+          <a:lstStyle/>
+          <a:p>
+            <a:r>
+              <a:rPr lang="fr-FR" dirty="0"/>
+              <a:t>Compare </a:t>
+            </a:r>
+            <a:r>
+              <a:rPr lang="fr-FR" dirty="0" err="1"/>
+              <a:t>Embeddings</a:t>
+            </a:r>
+            <a:endParaRPr lang="fr-FR" dirty="0"/>
+          </a:p>
+        </p:txBody>
+      </p:sp>
+      <p:sp>
+        <p:nvSpPr>
+          <p:cNvPr id="3" name="Espace réservé du contenu 2">
+            <a:extLst>
+              <a:ext uri="{FF2B5EF4-FFF2-40B4-BE49-F238E27FC236}">
+                <a16:creationId xmlns:a16="http://schemas.microsoft.com/office/drawing/2014/main" id="{6CBB7F9A-559F-026B-A9AD-0BCB757380EF}"/>
+              </a:ext>
+            </a:extLst>
+          </p:cNvPr>
+          <p:cNvSpPr>
+            <a:spLocks noGrp="1"/>
+          </p:cNvSpPr>
+          <p:nvPr>
+            <p:ph idx="1"/>
+          </p:nvPr>
+        </p:nvSpPr>
+        <p:spPr/>
+        <p:txBody>
+          <a:bodyPr/>
+          <a:lstStyle/>
+          <a:p>
+            <a:endParaRPr lang="fr-FR"/>
+          </a:p>
+        </p:txBody>
+      </p:sp>
+      <p:pic>
+        <p:nvPicPr>
+          <p:cNvPr id="5" name="Image 4">
+            <a:extLst>
+              <a:ext uri="{FF2B5EF4-FFF2-40B4-BE49-F238E27FC236}">
+                <a16:creationId xmlns:a16="http://schemas.microsoft.com/office/drawing/2014/main" id="{1205B068-73A0-8C07-5079-6956D229F0E5}"/>
+              </a:ext>
+            </a:extLst>
+          </p:cNvPr>
+          <p:cNvPicPr>
+            <a:picLocks noChangeAspect="1"/>
+          </p:cNvPicPr>
+          <p:nvPr/>
+        </p:nvPicPr>
+        <p:blipFill>
+          <a:blip r:embed="rId2"/>
+          <a:stretch>
+            <a:fillRect/>
+          </a:stretch>
+        </p:blipFill>
+        <p:spPr>
+          <a:xfrm>
+            <a:off x="790047" y="2060848"/>
+            <a:ext cx="7563906" cy="3248478"/>
+          </a:xfrm>
+          <a:prstGeom prst="rect">
+            <a:avLst/>
+          </a:prstGeom>
+        </p:spPr>
+      </p:pic>
+    </p:spTree>
+    <p:extLst>
+      <p:ext uri="{BB962C8B-B14F-4D97-AF65-F5344CB8AC3E}">
+        <p14:creationId xmlns:p14="http://schemas.microsoft.com/office/powerpoint/2010/main" val="1700314632"/>
+      </p:ext>
+    </p:extLst>
+  </p:cSld>
+  <p:clrMapOvr>
+    <a:masterClrMapping/>
+  </p:clrMapOvr>
+</p:sld>
+</file>
+
+<file path=ppt/slides/slide14.xml><?xml version="1.0" encoding="utf-8"?>
+<p:sld xmlns:a="http://schemas.openxmlformats.org/drawingml/2006/main" xmlns:r="http://schemas.openxmlformats.org/officeDocument/2006/relationships" xmlns:p="http://schemas.openxmlformats.org/presentationml/2006/main">
+  <p:cSld>
+    <p:spTree>
+      <p:nvGrpSpPr>
+        <p:cNvPr id="1" name=""/>
+        <p:cNvGrpSpPr/>
+        <p:nvPr/>
+      </p:nvGrpSpPr>
+      <p:grpSpPr>
+        <a:xfrm>
+          <a:off x="0" y="0"/>
+          <a:ext cx="0" cy="0"/>
+          <a:chOff x="0" y="0"/>
+          <a:chExt cx="0" cy="0"/>
+        </a:xfrm>
+      </p:grpSpPr>
+      <p:sp>
+        <p:nvSpPr>
+          <p:cNvPr id="2" name="Titre 1">
+            <a:extLst>
+              <a:ext uri="{FF2B5EF4-FFF2-40B4-BE49-F238E27FC236}">
                 <a16:creationId xmlns:a16="http://schemas.microsoft.com/office/drawing/2014/main" id="{B585B367-1E1B-19CB-081B-9D03ECBABA87}"/>
               </a:ext>
             </a:extLst>
@@ -4401,7 +4520,7 @@
 </p:sld>
 </file>
 
-<file path=ppt/slides/slide14.xml><?xml version="1.0" encoding="utf-8"?>
+<file path=ppt/slides/slide15.xml><?xml version="1.0" encoding="utf-8"?>
 <p:sld xmlns:a="http://schemas.openxmlformats.org/drawingml/2006/main" xmlns:r="http://schemas.openxmlformats.org/officeDocument/2006/relationships" xmlns:p="http://schemas.openxmlformats.org/presentationml/2006/main">
   <p:cSld>
     <p:spTree>
@@ -4585,7 +4704,7 @@
 </p:sld>
 </file>
 
-<file path=ppt/slides/slide15.xml><?xml version="1.0" encoding="utf-8"?>
+<file path=ppt/slides/slide16.xml><?xml version="1.0" encoding="utf-8"?>
 <p:sld xmlns:a="http://schemas.openxmlformats.org/drawingml/2006/main" xmlns:r="http://schemas.openxmlformats.org/officeDocument/2006/relationships" xmlns:p="http://schemas.openxmlformats.org/presentationml/2006/main">
   <p:cSld>
     <p:spTree>
@@ -4761,7 +4880,7 @@
 </p:sld>
 </file>
 
-<file path=ppt/slides/slide16.xml><?xml version="1.0" encoding="utf-8"?>
+<file path=ppt/slides/slide17.xml><?xml version="1.0" encoding="utf-8"?>
 <p:sld xmlns:a="http://schemas.openxmlformats.org/drawingml/2006/main" xmlns:r="http://schemas.openxmlformats.org/officeDocument/2006/relationships" xmlns:p="http://schemas.openxmlformats.org/presentationml/2006/main">
   <p:cSld>
     <p:spTree>
@@ -4965,7 +5084,7 @@
 </p:sld>
 </file>
 
-<file path=ppt/slides/slide17.xml><?xml version="1.0" encoding="utf-8"?>
+<file path=ppt/slides/slide18.xml><?xml version="1.0" encoding="utf-8"?>
 <p:sld xmlns:a="http://schemas.openxmlformats.org/drawingml/2006/main" xmlns:r="http://schemas.openxmlformats.org/officeDocument/2006/relationships" xmlns:p="http://schemas.openxmlformats.org/presentationml/2006/main">
   <p:cSld>
     <p:spTree>
@@ -5125,7 +5244,7 @@
 </p:sld>
 </file>
 
-<file path=ppt/slides/slide18.xml><?xml version="1.0" encoding="utf-8"?>
+<file path=ppt/slides/slide19.xml><?xml version="1.0" encoding="utf-8"?>
 <p:sld xmlns:a="http://schemas.openxmlformats.org/drawingml/2006/main" xmlns:r="http://schemas.openxmlformats.org/officeDocument/2006/relationships" xmlns:p="http://schemas.openxmlformats.org/presentationml/2006/main">
   <p:cSld>
     <p:spTree>
@@ -5233,126 +5352,6 @@
     <p:extLst>
       <p:ext uri="{BB962C8B-B14F-4D97-AF65-F5344CB8AC3E}">
         <p14:creationId xmlns:p14="http://schemas.microsoft.com/office/powerpoint/2010/main" val="259923011"/>
-      </p:ext>
-    </p:extLst>
-  </p:cSld>
-  <p:clrMapOvr>
-    <a:masterClrMapping/>
-  </p:clrMapOvr>
-</p:sld>
-</file>
-
-<file path=ppt/slides/slide19.xml><?xml version="1.0" encoding="utf-8"?>
-<p:sld xmlns:a="http://schemas.openxmlformats.org/drawingml/2006/main" xmlns:r="http://schemas.openxmlformats.org/officeDocument/2006/relationships" xmlns:p="http://schemas.openxmlformats.org/presentationml/2006/main">
-  <p:cSld>
-    <p:spTree>
-      <p:nvGrpSpPr>
-        <p:cNvPr id="1" name=""/>
-        <p:cNvGrpSpPr/>
-        <p:nvPr/>
-      </p:nvGrpSpPr>
-      <p:grpSpPr>
-        <a:xfrm>
-          <a:off x="0" y="0"/>
-          <a:ext cx="0" cy="0"/>
-          <a:chOff x="0" y="0"/>
-          <a:chExt cx="0" cy="0"/>
-        </a:xfrm>
-      </p:grpSpPr>
-      <p:sp>
-        <p:nvSpPr>
-          <p:cNvPr id="2" name="Titre 1">
-            <a:extLst>
-              <a:ext uri="{FF2B5EF4-FFF2-40B4-BE49-F238E27FC236}">
-                <a16:creationId xmlns:a16="http://schemas.microsoft.com/office/drawing/2014/main" id="{CCA200EB-2BC3-C8CC-5302-58924F5D9B2F}"/>
-              </a:ext>
-            </a:extLst>
-          </p:cNvPr>
-          <p:cNvSpPr>
-            <a:spLocks noGrp="1"/>
-          </p:cNvSpPr>
-          <p:nvPr>
-            <p:ph type="title"/>
-          </p:nvPr>
-        </p:nvSpPr>
-        <p:spPr/>
-        <p:txBody>
-          <a:bodyPr/>
-          <a:lstStyle/>
-          <a:p>
-            <a:r>
-              <a:rPr lang="fr-FR" dirty="0"/>
-              <a:t>Autres modèles d'</a:t>
-            </a:r>
-            <a:r>
-              <a:rPr lang="fr-FR" dirty="0" err="1"/>
-              <a:t>embedding</a:t>
-            </a:r>
-            <a:endParaRPr lang="fr-FR" dirty="0"/>
-          </a:p>
-        </p:txBody>
-      </p:sp>
-      <p:sp>
-        <p:nvSpPr>
-          <p:cNvPr id="3" name="Espace réservé du contenu 2">
-            <a:extLst>
-              <a:ext uri="{FF2B5EF4-FFF2-40B4-BE49-F238E27FC236}">
-                <a16:creationId xmlns:a16="http://schemas.microsoft.com/office/drawing/2014/main" id="{E06CF2C3-A7CC-2CFC-B617-E0F328943FFF}"/>
-              </a:ext>
-            </a:extLst>
-          </p:cNvPr>
-          <p:cNvSpPr>
-            <a:spLocks noGrp="1"/>
-          </p:cNvSpPr>
-          <p:nvPr>
-            <p:ph idx="1"/>
-          </p:nvPr>
-        </p:nvSpPr>
-        <p:spPr/>
-        <p:txBody>
-          <a:bodyPr/>
-          <a:lstStyle/>
-          <a:p>
-            <a:r>
-              <a:rPr lang="fr-FR" dirty="0"/>
-              <a:t>Mistral-</a:t>
-            </a:r>
-            <a:r>
-              <a:rPr lang="fr-FR" dirty="0" err="1"/>
-              <a:t>embed</a:t>
-            </a:r>
-            <a:endParaRPr lang="fr-FR" dirty="0"/>
-          </a:p>
-          <a:p>
-            <a:r>
-              <a:rPr lang="fr-FR" dirty="0"/>
-              <a:t>Claude-</a:t>
-            </a:r>
-            <a:r>
-              <a:rPr lang="fr-FR" dirty="0" err="1"/>
-              <a:t>embed</a:t>
-            </a:r>
-            <a:endParaRPr lang="fr-FR" dirty="0"/>
-          </a:p>
-          <a:p>
-            <a:r>
-              <a:rPr lang="fr-FR" dirty="0" err="1"/>
-              <a:t>ChatGPT-embed</a:t>
-            </a:r>
-            <a:endParaRPr lang="fr-FR" dirty="0"/>
-          </a:p>
-          <a:p>
-            <a:r>
-              <a:rPr lang="fr-FR" dirty="0"/>
-              <a:t>Chacun avec 1024 à 3072 float32</a:t>
-            </a:r>
-          </a:p>
-        </p:txBody>
-      </p:sp>
-    </p:spTree>
-    <p:extLst>
-      <p:ext uri="{BB962C8B-B14F-4D97-AF65-F5344CB8AC3E}">
-        <p14:creationId xmlns:p14="http://schemas.microsoft.com/office/powerpoint/2010/main" val="2540863307"/>
       </p:ext>
     </p:extLst>
   </p:cSld>
@@ -5446,6 +5445,126 @@
     <p:extLst>
       <p:ext uri="{BB962C8B-B14F-4D97-AF65-F5344CB8AC3E}">
         <p14:creationId xmlns:p14="http://schemas.microsoft.com/office/powerpoint/2010/main" val="3973704284"/>
+      </p:ext>
+    </p:extLst>
+  </p:cSld>
+  <p:clrMapOvr>
+    <a:masterClrMapping/>
+  </p:clrMapOvr>
+</p:sld>
+</file>
+
+<file path=ppt/slides/slide20.xml><?xml version="1.0" encoding="utf-8"?>
+<p:sld xmlns:a="http://schemas.openxmlformats.org/drawingml/2006/main" xmlns:r="http://schemas.openxmlformats.org/officeDocument/2006/relationships" xmlns:p="http://schemas.openxmlformats.org/presentationml/2006/main">
+  <p:cSld>
+    <p:spTree>
+      <p:nvGrpSpPr>
+        <p:cNvPr id="1" name=""/>
+        <p:cNvGrpSpPr/>
+        <p:nvPr/>
+      </p:nvGrpSpPr>
+      <p:grpSpPr>
+        <a:xfrm>
+          <a:off x="0" y="0"/>
+          <a:ext cx="0" cy="0"/>
+          <a:chOff x="0" y="0"/>
+          <a:chExt cx="0" cy="0"/>
+        </a:xfrm>
+      </p:grpSpPr>
+      <p:sp>
+        <p:nvSpPr>
+          <p:cNvPr id="2" name="Titre 1">
+            <a:extLst>
+              <a:ext uri="{FF2B5EF4-FFF2-40B4-BE49-F238E27FC236}">
+                <a16:creationId xmlns:a16="http://schemas.microsoft.com/office/drawing/2014/main" id="{CCA200EB-2BC3-C8CC-5302-58924F5D9B2F}"/>
+              </a:ext>
+            </a:extLst>
+          </p:cNvPr>
+          <p:cNvSpPr>
+            <a:spLocks noGrp="1"/>
+          </p:cNvSpPr>
+          <p:nvPr>
+            <p:ph type="title"/>
+          </p:nvPr>
+        </p:nvSpPr>
+        <p:spPr/>
+        <p:txBody>
+          <a:bodyPr/>
+          <a:lstStyle/>
+          <a:p>
+            <a:r>
+              <a:rPr lang="fr-FR" dirty="0"/>
+              <a:t>Autres modèles d'</a:t>
+            </a:r>
+            <a:r>
+              <a:rPr lang="fr-FR" dirty="0" err="1"/>
+              <a:t>embedding</a:t>
+            </a:r>
+            <a:endParaRPr lang="fr-FR" dirty="0"/>
+          </a:p>
+        </p:txBody>
+      </p:sp>
+      <p:sp>
+        <p:nvSpPr>
+          <p:cNvPr id="3" name="Espace réservé du contenu 2">
+            <a:extLst>
+              <a:ext uri="{FF2B5EF4-FFF2-40B4-BE49-F238E27FC236}">
+                <a16:creationId xmlns:a16="http://schemas.microsoft.com/office/drawing/2014/main" id="{E06CF2C3-A7CC-2CFC-B617-E0F328943FFF}"/>
+              </a:ext>
+            </a:extLst>
+          </p:cNvPr>
+          <p:cNvSpPr>
+            <a:spLocks noGrp="1"/>
+          </p:cNvSpPr>
+          <p:nvPr>
+            <p:ph idx="1"/>
+          </p:nvPr>
+        </p:nvSpPr>
+        <p:spPr/>
+        <p:txBody>
+          <a:bodyPr/>
+          <a:lstStyle/>
+          <a:p>
+            <a:r>
+              <a:rPr lang="fr-FR" dirty="0"/>
+              <a:t>Mistral-</a:t>
+            </a:r>
+            <a:r>
+              <a:rPr lang="fr-FR" dirty="0" err="1"/>
+              <a:t>embed</a:t>
+            </a:r>
+            <a:endParaRPr lang="fr-FR" dirty="0"/>
+          </a:p>
+          <a:p>
+            <a:r>
+              <a:rPr lang="fr-FR" dirty="0"/>
+              <a:t>Claude-</a:t>
+            </a:r>
+            <a:r>
+              <a:rPr lang="fr-FR" dirty="0" err="1"/>
+              <a:t>embed</a:t>
+            </a:r>
+            <a:endParaRPr lang="fr-FR" dirty="0"/>
+          </a:p>
+          <a:p>
+            <a:r>
+              <a:rPr lang="fr-FR" dirty="0" err="1"/>
+              <a:t>ChatGPT-embed</a:t>
+            </a:r>
+            <a:endParaRPr lang="fr-FR" dirty="0"/>
+          </a:p>
+          <a:p>
+            <a:r>
+              <a:rPr lang="fr-FR" dirty="0"/>
+              <a:t>Chacun avec 1024 à 3072 float32</a:t>
+            </a:r>
+          </a:p>
+        </p:txBody>
+      </p:sp>
+    </p:spTree>
+    <p:extLst>
+      <p:ext uri="{BB962C8B-B14F-4D97-AF65-F5344CB8AC3E}">
+        <p14:creationId xmlns:p14="http://schemas.microsoft.com/office/powerpoint/2010/main" val="2540863307"/>
       </p:ext>
     </p:extLst>
   </p:cSld>
